--- a/Week 5/onwusaChukwudiTelcoCustomerChurnAnalysisPresentation.pptx
+++ b/Week 5/onwusaChukwudiTelcoCustomerChurnAnalysisPresentation.pptx
@@ -5452,10 +5452,10 @@
       </p:sp>
       <p:pic>
         <p:nvPicPr>
-          <p:cNvPr id="2" name="Picture 1">
+          <p:cNvPr id="5" name="Picture 4">
             <a:extLst>
               <a:ext uri="{FF2B5EF4-FFF2-40B4-BE49-F238E27FC236}">
-                <a16:creationId xmlns:a16="http://schemas.microsoft.com/office/drawing/2014/main" id="{3E832636-CCEF-25D7-0A00-87838A5B5B54}"/>
+                <a16:creationId xmlns:a16="http://schemas.microsoft.com/office/drawing/2014/main" id="{04787C76-7E46-5101-F939-3928CE82EEF8}"/>
               </a:ext>
             </a:extLst>
           </p:cNvPr>
@@ -5472,8 +5472,8 @@
         </p:blipFill>
         <p:spPr>
           <a:xfrm>
-            <a:off x="533400" y="1465678"/>
-            <a:ext cx="6964741" cy="3910335"/>
+            <a:off x="502920" y="1478279"/>
+            <a:ext cx="7057731" cy="3984572"/>
           </a:xfrm>
           <a:prstGeom prst="rect">
             <a:avLst/>
